--- a/slides/financial-report-template/financial-report-dark.pptx
+++ b/slides/financial-report-template/financial-report-dark.pptx
@@ -12300,7 +12300,7 @@
         <p:spPr>
           <a:xfrm>
             <a:off x="320040" y="228600"/>
-            <a:ext cx="2743200" cy="365760"/>
+            <a:ext cx="2743200" cy="1463040"/>
           </a:xfrm>
           <a:prstGeom prst="rect">
             <a:avLst/>
@@ -12309,16 +12309,19 @@
           <a:ln/>
         </p:spPr>
         <p:txBody>
-          <a:bodyPr wrap="square" lIns="0" tIns="0" rIns="0" bIns="0" rtlCol="0" anchor="t"/>
+          <a:bodyPr wrap="square" lIns="0" tIns="0" rIns="0" bIns="0" rtlCol="0" anchor="b"/>
           <a:lstStyle/>
           <a:p>
             <a:pPr indent="0" marL="0">
+              <a:lnSpc>
+                <a:spcPct val="95000"/>
+              </a:lnSpc>
               <a:buNone/>
             </a:pPr>
             <a:r>
-              <a:rPr lang="en-US" sz="800" dirty="0">
+              <a:rPr lang="en-US" sz="1800" dirty="0">
                 <a:solidFill>
-                  <a:srgbClr val="FFFFFF"/>
+                  <a:srgbClr val="8E8E93"/>
                 </a:solidFill>
                 <a:latin typeface="Arial" pitchFamily="34" charset="0"/>
                 <a:ea typeface="Arial" pitchFamily="34" charset="-122"/>
@@ -12326,14 +12329,17 @@
               </a:rPr>
               <a:t>FY 2024</a:t>
             </a:r>
-            <a:endParaRPr lang="en-US" sz="800" dirty="0"/>
+            <a:endParaRPr lang="en-US" sz="1800" dirty="0"/>
           </a:p>
           <a:p>
             <a:pPr indent="0" marL="0">
+              <a:lnSpc>
+                <a:spcPct val="95000"/>
+              </a:lnSpc>
               <a:buNone/>
             </a:pPr>
             <a:r>
-              <a:rPr lang="en-US" sz="800" b="1" dirty="0">
+              <a:rPr lang="en-US" sz="1800" b="1" dirty="0">
                 <a:solidFill>
                   <a:srgbClr val="FFFFFF"/>
                 </a:solidFill>
@@ -12343,7 +12349,7 @@
               </a:rPr>
               <a:t>Highlights</a:t>
             </a:r>
-            <a:endParaRPr lang="en-US" sz="800" dirty="0"/>
+            <a:endParaRPr lang="en-US" sz="1800" dirty="0"/>
           </a:p>
         </p:txBody>
       </p:sp>
@@ -12355,8 +12361,8 @@
         </p:nvSpPr>
         <p:spPr>
           <a:xfrm>
-            <a:off x="320040" y="1783080"/>
-            <a:ext cx="2743200" cy="3108960"/>
+            <a:off x="320040" y="1828800"/>
+            <a:ext cx="2743200" cy="3063240"/>
           </a:xfrm>
           <a:prstGeom prst="roundRect">
             <a:avLst>
@@ -12382,8 +12388,8 @@
         </p:nvSpPr>
         <p:spPr>
           <a:xfrm>
-            <a:off x="457200" y="1920240"/>
-            <a:ext cx="2468880" cy="2606040"/>
+            <a:off x="502920" y="2011680"/>
+            <a:ext cx="2377440" cy="2496312"/>
           </a:xfrm>
           <a:prstGeom prst="rect">
             <a:avLst/>
@@ -12392,10 +12398,13 @@
           <a:ln/>
         </p:spPr>
         <p:txBody>
-          <a:bodyPr wrap="square" lIns="0" tIns="0" rIns="0" bIns="0" rtlCol="0" anchor="t"/>
+          <a:bodyPr wrap="square" lIns="0" tIns="0" rIns="0" bIns="0" rtlCol="0" anchor="ctr"/>
           <a:lstStyle/>
           <a:p>
             <a:pPr indent="0" marL="0">
+              <a:lnSpc>
+                <a:spcPct val="110000"/>
+              </a:lnSpc>
               <a:buNone/>
             </a:pPr>
             <a:r>
@@ -12421,8 +12430,8 @@
         </p:nvSpPr>
         <p:spPr>
           <a:xfrm>
-            <a:off x="457200" y="4599432"/>
-            <a:ext cx="2468880" cy="182880"/>
+            <a:off x="502920" y="4507992"/>
+            <a:ext cx="2377440" cy="201168"/>
           </a:xfrm>
           <a:prstGeom prst="rect">
             <a:avLst/>
@@ -12487,8 +12496,8 @@
         </p:nvSpPr>
         <p:spPr>
           <a:xfrm>
-            <a:off x="3337560" y="365760"/>
-            <a:ext cx="2468880" cy="960120"/>
+            <a:off x="3383280" y="411480"/>
+            <a:ext cx="2377440" cy="896112"/>
           </a:xfrm>
           <a:prstGeom prst="rect">
             <a:avLst/>
@@ -12497,10 +12506,13 @@
           <a:ln/>
         </p:spPr>
         <p:txBody>
-          <a:bodyPr wrap="square" lIns="0" tIns="0" rIns="0" bIns="0" rtlCol="0" anchor="t"/>
+          <a:bodyPr wrap="square" lIns="0" tIns="0" rIns="0" bIns="0" rtlCol="0" anchor="ctr"/>
           <a:lstStyle/>
           <a:p>
             <a:pPr indent="0" marL="0">
+              <a:lnSpc>
+                <a:spcPct val="110000"/>
+              </a:lnSpc>
               <a:buNone/>
             </a:pPr>
             <a:r>
@@ -12526,8 +12538,8 @@
         </p:nvSpPr>
         <p:spPr>
           <a:xfrm>
-            <a:off x="3337560" y="1399032"/>
-            <a:ext cx="2468880" cy="182880"/>
+            <a:off x="3383280" y="1307592"/>
+            <a:ext cx="2377440" cy="201168"/>
           </a:xfrm>
           <a:prstGeom prst="rect">
             <a:avLst/>
@@ -12592,8 +12604,8 @@
         </p:nvSpPr>
         <p:spPr>
           <a:xfrm>
-            <a:off x="3337560" y="1920240"/>
-            <a:ext cx="2468880" cy="640080"/>
+            <a:off x="3383280" y="2011680"/>
+            <a:ext cx="2377440" cy="1097280"/>
           </a:xfrm>
           <a:prstGeom prst="rect">
             <a:avLst/>
@@ -12602,10 +12614,13 @@
           <a:ln/>
         </p:spPr>
         <p:txBody>
-          <a:bodyPr wrap="square" lIns="0" tIns="0" rIns="0" bIns="0" rtlCol="0" anchor="t"/>
+          <a:bodyPr wrap="square" lIns="0" tIns="0" rIns="0" bIns="0" rtlCol="0" anchor="ctr"/>
           <a:lstStyle/>
           <a:p>
             <a:pPr indent="0" marL="0">
+              <a:lnSpc>
+                <a:spcPct val="110000"/>
+              </a:lnSpc>
               <a:buNone/>
             </a:pPr>
             <a:r>
@@ -12658,8 +12673,8 @@
         </p:nvSpPr>
         <p:spPr>
           <a:xfrm>
-            <a:off x="3337560" y="3566160"/>
-            <a:ext cx="2468880" cy="960120"/>
+            <a:off x="3383280" y="3611880"/>
+            <a:ext cx="2377440" cy="896112"/>
           </a:xfrm>
           <a:prstGeom prst="rect">
             <a:avLst/>
@@ -12668,10 +12683,13 @@
           <a:ln/>
         </p:spPr>
         <p:txBody>
-          <a:bodyPr wrap="square" lIns="0" tIns="0" rIns="0" bIns="0" rtlCol="0" anchor="t"/>
+          <a:bodyPr wrap="square" lIns="0" tIns="0" rIns="0" bIns="0" rtlCol="0" anchor="ctr"/>
           <a:lstStyle/>
           <a:p>
             <a:pPr indent="0" marL="0">
+              <a:lnSpc>
+                <a:spcPct val="110000"/>
+              </a:lnSpc>
               <a:buNone/>
             </a:pPr>
             <a:r>
@@ -12697,8 +12715,8 @@
         </p:nvSpPr>
         <p:spPr>
           <a:xfrm>
-            <a:off x="3337560" y="4599432"/>
-            <a:ext cx="2468880" cy="182880"/>
+            <a:off x="3383280" y="4507992"/>
+            <a:ext cx="2377440" cy="201168"/>
           </a:xfrm>
           <a:prstGeom prst="rect">
             <a:avLst/>
@@ -12763,8 +12781,8 @@
         </p:nvSpPr>
         <p:spPr>
           <a:xfrm>
-            <a:off x="6217920" y="320040"/>
-            <a:ext cx="2468880" cy="640080"/>
+            <a:off x="6263640" y="411480"/>
+            <a:ext cx="2377440" cy="2697480"/>
           </a:xfrm>
           <a:prstGeom prst="rect">
             <a:avLst/>
@@ -12773,14 +12791,17 @@
           <a:ln/>
         </p:spPr>
         <p:txBody>
-          <a:bodyPr wrap="square" lIns="0" tIns="0" rIns="0" bIns="0" rtlCol="0" anchor="t"/>
+          <a:bodyPr wrap="square" lIns="0" tIns="0" rIns="0" bIns="0" rtlCol="0" anchor="ctr"/>
           <a:lstStyle/>
           <a:p>
             <a:pPr indent="0" marL="0">
+              <a:lnSpc>
+                <a:spcPct val="110000"/>
+              </a:lnSpc>
               <a:buNone/>
             </a:pPr>
             <a:r>
-              <a:rPr lang="en-US" sz="900" dirty="0">
+              <a:rPr lang="en-US" sz="2000" b="1" dirty="0">
                 <a:solidFill>
                   <a:srgbClr val="FFFFFF"/>
                 </a:solidFill>
@@ -12788,9 +12809,29 @@
                 <a:ea typeface="Arial" pitchFamily="34" charset="-122"/>
                 <a:cs typeface="Arial" pitchFamily="34" charset="-120"/>
               </a:rPr>
-              <a:t>74M units sold</a:t>
+              <a:t>74M</a:t>
             </a:r>
-            <a:endParaRPr lang="en-US" sz="900" dirty="0"/>
+            <a:endParaRPr lang="en-US" sz="2000" dirty="0"/>
+          </a:p>
+          <a:p>
+            <a:pPr indent="0" marL="0">
+              <a:lnSpc>
+                <a:spcPct val="110000"/>
+              </a:lnSpc>
+              <a:buNone/>
+            </a:pPr>
+            <a:r>
+              <a:rPr lang="en-US" sz="2000" b="1" dirty="0">
+                <a:solidFill>
+                  <a:srgbClr val="FFFFFF"/>
+                </a:solidFill>
+                <a:latin typeface="Arial" pitchFamily="34" charset="0"/>
+                <a:ea typeface="Arial" pitchFamily="34" charset="-122"/>
+                <a:cs typeface="Arial" pitchFamily="34" charset="-120"/>
+              </a:rPr>
+              <a:t>units sold</a:t>
+            </a:r>
+            <a:endParaRPr lang="en-US" sz="2000" dirty="0"/>
           </a:p>
         </p:txBody>
       </p:sp>
@@ -12829,8 +12870,8 @@
         </p:nvSpPr>
         <p:spPr>
           <a:xfrm>
-            <a:off x="6217920" y="3520440"/>
-            <a:ext cx="2468880" cy="640080"/>
+            <a:off x="6263640" y="3611880"/>
+            <a:ext cx="2377440" cy="1097280"/>
           </a:xfrm>
           <a:prstGeom prst="rect">
             <a:avLst/>
@@ -12839,10 +12880,13 @@
           <a:ln/>
         </p:spPr>
         <p:txBody>
-          <a:bodyPr wrap="square" lIns="0" tIns="0" rIns="0" bIns="0" rtlCol="0" anchor="t"/>
+          <a:bodyPr wrap="square" lIns="0" tIns="0" rIns="0" bIns="0" rtlCol="0" anchor="ctr"/>
           <a:lstStyle/>
           <a:p>
             <a:pPr indent="0" marL="0">
+              <a:lnSpc>
+                <a:spcPct val="110000"/>
+              </a:lnSpc>
               <a:buNone/>
             </a:pPr>
             <a:r>
@@ -12860,6 +12904,9 @@
           </a:p>
           <a:p>
             <a:pPr indent="0" marL="0">
+              <a:lnSpc>
+                <a:spcPct val="110000"/>
+              </a:lnSpc>
               <a:buNone/>
             </a:pPr>
             <a:r>

--- a/slides/financial-report-template/financial-report-dark.pptx
+++ b/slides/financial-report-template/financial-report-dark.pptx
@@ -7501,7 +7501,7 @@
           <a:p>
             <a:r>
               <a:rPr lang="en-US" dirty="0"/>
-              <a:t>Replace the grey block on the right with a full-bleed image.</a:t>
+              <a:t>Replace the large block on the right with a photo. Keep the small offset block behind it — it is what ties this slide to the rest of the deck.</a:t>
             </a:r>
             <a:endParaRPr lang="en-US" dirty="0"/>
           </a:p>
@@ -30760,8 +30760,8 @@
         </p:nvSpPr>
         <p:spPr>
           <a:xfrm>
-            <a:off x="320040" y="228600"/>
-            <a:ext cx="2743200" cy="365760"/>
+            <a:off x="320040" y="182880"/>
+            <a:ext cx="5486400" cy="182880"/>
           </a:xfrm>
           <a:prstGeom prst="rect">
             <a:avLst/>
@@ -30777,9 +30777,9 @@
               <a:buNone/>
             </a:pPr>
             <a:r>
-              <a:rPr lang="en-US" sz="800" dirty="0">
+              <a:rPr lang="en-US" sz="700" dirty="0">
                 <a:solidFill>
-                  <a:srgbClr val="FFFFFF"/>
+                  <a:srgbClr val="8E8E93"/>
                 </a:solidFill>
                 <a:latin typeface="Arial" pitchFamily="34" charset="0"/>
                 <a:ea typeface="Arial" pitchFamily="34" charset="-122"/>
@@ -30787,24 +30787,7 @@
               </a:rPr>
               <a:t>FY 2024</a:t>
             </a:r>
-            <a:endParaRPr lang="en-US" sz="800" dirty="0"/>
-          </a:p>
-          <a:p>
-            <a:pPr indent="0" marL="0">
-              <a:buNone/>
-            </a:pPr>
-            <a:r>
-              <a:rPr lang="en-US" sz="800" b="1" dirty="0">
-                <a:solidFill>
-                  <a:srgbClr val="FFFFFF"/>
-                </a:solidFill>
-                <a:latin typeface="Arial" pitchFamily="34" charset="0"/>
-                <a:ea typeface="Arial" pitchFamily="34" charset="-122"/>
-                <a:cs typeface="Arial" pitchFamily="34" charset="-120"/>
-              </a:rPr>
-              <a:t>Highlights</a:t>
-            </a:r>
-            <a:endParaRPr lang="en-US" sz="800" dirty="0"/>
+            <a:endParaRPr lang="en-US" sz="700" dirty="0"/>
           </a:p>
         </p:txBody>
       </p:sp>
@@ -30816,8 +30799,8 @@
         </p:nvSpPr>
         <p:spPr>
           <a:xfrm>
-            <a:off x="320040" y="2468880"/>
-            <a:ext cx="3931920" cy="2377440"/>
+            <a:off x="320040" y="329184"/>
+            <a:ext cx="5669280" cy="457200"/>
           </a:xfrm>
           <a:prstGeom prst="rect">
             <a:avLst/>
@@ -30826,12 +30809,54 @@
           <a:ln/>
         </p:spPr>
         <p:txBody>
-          <a:bodyPr wrap="square" lIns="0" tIns="0" rIns="0" bIns="0" rtlCol="0" anchor="b"/>
+          <a:bodyPr wrap="square" lIns="0" tIns="0" rIns="0" bIns="0" rtlCol="0" anchor="t"/>
+          <a:lstStyle/>
+          <a:p>
+            <a:pPr indent="0" marL="0">
+              <a:lnSpc>
+                <a:spcPct val="95000"/>
+              </a:lnSpc>
+              <a:buNone/>
+            </a:pPr>
+            <a:r>
+              <a:rPr lang="en-US" sz="2200" dirty="0">
+                <a:solidFill>
+                  <a:srgbClr val="FFFFFF"/>
+                </a:solidFill>
+                <a:latin typeface="Arial" pitchFamily="34" charset="0"/>
+                <a:ea typeface="Arial" pitchFamily="34" charset="-122"/>
+                <a:cs typeface="Arial" pitchFamily="34" charset="-120"/>
+              </a:rPr>
+              <a:t>Highlights</a:t>
+            </a:r>
+            <a:endParaRPr lang="en-US" sz="2200" dirty="0"/>
+          </a:p>
+        </p:txBody>
+      </p:sp>
+      <p:sp>
+        <p:nvSpPr>
+          <p:cNvPr id="4" name="Text 2"/>
+          <p:cNvSpPr txBox="1"/>
+          <p:nvPr/>
+        </p:nvSpPr>
+        <p:spPr>
+          <a:xfrm>
+            <a:off x="320040" y="1371600"/>
+            <a:ext cx="3931920" cy="3520440"/>
+          </a:xfrm>
+          <a:prstGeom prst="rect">
+            <a:avLst/>
+          </a:prstGeom>
+          <a:noFill/>
+          <a:ln/>
+        </p:spPr>
+        <p:txBody>
+          <a:bodyPr wrap="square" lIns="0" tIns="0" rIns="0" bIns="0" rtlCol="0" anchor="t"/>
           <a:lstStyle/>
           <a:p>
             <a:pPr marL="342900" indent="-342900">
               <a:spcAft>
-                <a:spcPts val="1000"/>
+                <a:spcPts val="1400"/>
               </a:spcAft>
               <a:buSzPct val="100000"/>
               <a:buChar char="▸"/>
@@ -30852,7 +30877,7 @@
           <a:p>
             <a:pPr marL="342900" indent="-342900">
               <a:spcAft>
-                <a:spcPts val="1000"/>
+                <a:spcPts val="1400"/>
               </a:spcAft>
               <a:buSzPct val="100000"/>
               <a:buChar char="▸"/>
@@ -30873,7 +30898,7 @@
           <a:p>
             <a:pPr marL="342900" indent="-342900">
               <a:spcAft>
-                <a:spcPts val="1000"/>
+                <a:spcPts val="1400"/>
               </a:spcAft>
               <a:buSzPct val="100000"/>
               <a:buChar char="▸"/>
@@ -30895,18 +30920,45 @@
       </p:sp>
       <p:sp>
         <p:nvSpPr>
-          <p:cNvPr id="4" name="Shape 2"/>
+          <p:cNvPr id="5" name="Shape 3"/>
           <p:cNvSpPr/>
           <p:nvPr/>
         </p:nvSpPr>
         <p:spPr>
           <a:xfrm>
-            <a:off x="4709160" y="228600"/>
-            <a:ext cx="4114800" cy="4663440"/>
+            <a:off x="4617720" y="3017520"/>
+            <a:ext cx="1828800" cy="1874520"/>
           </a:xfrm>
           <a:prstGeom prst="roundRect">
             <a:avLst>
-              <a:gd name="adj" fmla="val 1778"/>
+              <a:gd name="adj" fmla="val 4000"/>
+            </a:avLst>
+          </a:prstGeom>
+          <a:solidFill>
+            <a:srgbClr val="8E8E93"/>
+          </a:solidFill>
+          <a:ln w="12700">
+            <a:solidFill>
+              <a:srgbClr val="8E8E93"/>
+            </a:solidFill>
+            <a:prstDash val="solid"/>
+          </a:ln>
+        </p:spPr>
+      </p:sp>
+      <p:sp>
+        <p:nvSpPr>
+          <p:cNvPr id="6" name="Shape 4"/>
+          <p:cNvSpPr/>
+          <p:nvPr/>
+        </p:nvSpPr>
+        <p:spPr>
+          <a:xfrm>
+            <a:off x="5120640" y="228600"/>
+            <a:ext cx="3703320" cy="4663440"/>
+          </a:xfrm>
+          <a:prstGeom prst="roundRect">
+            <a:avLst>
+              <a:gd name="adj" fmla="val 1975"/>
             </a:avLst>
           </a:prstGeom>
           <a:solidFill>
@@ -30915,37 +30967,6 @@
           <a:ln w="12700">
             <a:solidFill>
               <a:srgbClr val="C7C7CC"/>
-            </a:solidFill>
-            <a:prstDash val="solid"/>
-          </a:ln>
-        </p:spPr>
-      </p:sp>
-      <p:sp>
-        <p:nvSpPr>
-          <p:cNvPr id="5" name="Shape 3"/>
-          <p:cNvSpPr/>
-          <p:nvPr/>
-        </p:nvSpPr>
-        <p:spPr>
-          <a:xfrm>
-            <a:off x="4709160" y="2560320"/>
-            <a:ext cx="4114800" cy="2331720"/>
-          </a:xfrm>
-          <a:prstGeom prst="roundRect">
-            <a:avLst>
-              <a:gd name="adj" fmla="val 3137"/>
-            </a:avLst>
-          </a:prstGeom>
-          <a:solidFill>
-            <a:srgbClr val="8E8E93">
-              <a:alpha val="45000"/>
-            </a:srgbClr>
-          </a:solidFill>
-          <a:ln w="12700">
-            <a:solidFill>
-              <a:srgbClr val="8E8E93">
-                <a:alpha val="0"/>
-              </a:srgbClr>
             </a:solidFill>
             <a:prstDash val="solid"/>
           </a:ln>
